--- a/class/cloud_infra_mgmt/14주차_통합실습2/01_강의자료/1차시_HPA개념과오토스케일링설정.pptx
+++ b/class/cloud_infra_mgmt/14주차_통합실습2/01_강의자료/1차시_HPA개념과오토스케일링설정.pptx
@@ -9678,7 +9678,7 @@
               </a:lnSpc>
             </a:pPr>
             <a:r>
-              <a:rPr sz="1500" b="1">
+              <a:rPr sz="1700" b="1">
                 <a:solidFill>
                   <a:srgbClr val="0D9488"/>
                 </a:solidFill>
@@ -9687,7 +9687,7 @@
               <a:t>●  </a:t>
             </a:r>
             <a:r>
-              <a:rPr sz="1500" b="0">
+              <a:rPr sz="1700" b="0">
                 <a:solidFill>
                   <a:srgbClr val="222733"/>
                 </a:solidFill>
@@ -9703,7 +9703,7 @@
               </a:lnSpc>
             </a:pPr>
             <a:r>
-              <a:rPr sz="1500" b="1">
+              <a:rPr sz="1700" b="1">
                 <a:solidFill>
                   <a:srgbClr val="0D9488"/>
                 </a:solidFill>
@@ -9712,7 +9712,7 @@
               <a:t>●  </a:t>
             </a:r>
             <a:r>
-              <a:rPr sz="1500" b="0">
+              <a:rPr sz="1700" b="0">
                 <a:solidFill>
                   <a:srgbClr val="222733"/>
                 </a:solidFill>
@@ -9728,7 +9728,7 @@
               </a:lnSpc>
             </a:pPr>
             <a:r>
-              <a:rPr sz="1500" b="1">
+              <a:rPr sz="1700" b="1">
                 <a:solidFill>
                   <a:srgbClr val="0D9488"/>
                 </a:solidFill>
@@ -9737,7 +9737,7 @@
               <a:t>●  </a:t>
             </a:r>
             <a:r>
-              <a:rPr sz="1500" b="0">
+              <a:rPr sz="1700" b="0">
                 <a:solidFill>
                   <a:srgbClr val="222733"/>
                 </a:solidFill>

--- a/class/cloud_infra_mgmt/14주차_통합실습2/01_강의자료/1차시_HPA개념과오토스케일링설정.pptx
+++ b/class/cloud_infra_mgmt/14주차_통합실습2/01_강의자료/1차시_HPA개념과오토스케일링설정.pptx
@@ -5355,7 +5355,7 @@
           <a:p>
             <a:pPr>
               <a:lnSpc>
-                <a:spcPct val="115000"/>
+                <a:spcPct val="149500"/>
               </a:lnSpc>
             </a:pPr>
             <a:r>
@@ -5380,7 +5380,7 @@
           <a:p>
             <a:pPr>
               <a:lnSpc>
-                <a:spcPct val="115000"/>
+                <a:spcPct val="149500"/>
               </a:lnSpc>
             </a:pPr>
             <a:r>
@@ -5405,7 +5405,7 @@
           <a:p>
             <a:pPr>
               <a:lnSpc>
-                <a:spcPct val="115000"/>
+                <a:spcPct val="149500"/>
               </a:lnSpc>
             </a:pPr>
             <a:r>
@@ -5796,7 +5796,7 @@
           <a:p>
             <a:pPr>
               <a:lnSpc>
-                <a:spcPct val="115000"/>
+                <a:spcPct val="149500"/>
               </a:lnSpc>
             </a:pPr>
             <a:r>
@@ -5821,7 +5821,7 @@
           <a:p>
             <a:pPr>
               <a:lnSpc>
-                <a:spcPct val="115000"/>
+                <a:spcPct val="149500"/>
               </a:lnSpc>
             </a:pPr>
             <a:r>
@@ -5846,7 +5846,7 @@
           <a:p>
             <a:pPr>
               <a:lnSpc>
-                <a:spcPct val="115000"/>
+                <a:spcPct val="149500"/>
               </a:lnSpc>
             </a:pPr>
             <a:r>
@@ -5871,7 +5871,7 @@
           <a:p>
             <a:pPr>
               <a:lnSpc>
-                <a:spcPct val="115000"/>
+                <a:spcPct val="149500"/>
               </a:lnSpc>
             </a:pPr>
             <a:r>
@@ -6262,7 +6262,7 @@
           <a:p>
             <a:pPr>
               <a:lnSpc>
-                <a:spcPct val="115000"/>
+                <a:spcPct val="149500"/>
               </a:lnSpc>
             </a:pPr>
             <a:r>
@@ -6287,7 +6287,7 @@
           <a:p>
             <a:pPr>
               <a:lnSpc>
-                <a:spcPct val="115000"/>
+                <a:spcPct val="149500"/>
               </a:lnSpc>
             </a:pPr>
             <a:r>
@@ -6312,7 +6312,7 @@
           <a:p>
             <a:pPr>
               <a:lnSpc>
-                <a:spcPct val="115000"/>
+                <a:spcPct val="149500"/>
               </a:lnSpc>
             </a:pPr>
             <a:r>
@@ -7561,16 +7561,60 @@
       </p:sp>
       <p:sp>
         <p:nvSpPr>
-          <p:cNvPr id="7" name="Isosceles Triangle 6"/>
+          <p:cNvPr id="7" name="Rectangle 6"/>
           <p:cNvSpPr/>
           <p:nvPr/>
         </p:nvSpPr>
         <p:spPr>
-          <a:xfrm rot="5400000">
-            <a:off x="4423409" y="1673352"/>
-            <a:ext cx="146304" cy="146304"/>
-          </a:xfrm>
-          <a:prstGeom prst="triangle">
+          <a:xfrm>
+            <a:off x="6359651" y="1730959"/>
+            <a:ext cx="2665476" cy="31089"/>
+          </a:xfrm>
+          <a:prstGeom prst="rect">
+            <a:avLst/>
+          </a:prstGeom>
+          <a:solidFill>
+            <a:srgbClr val="14B8A6"/>
+          </a:solidFill>
+          <a:ln>
+            <a:noFill/>
+          </a:ln>
+          <a:effectLst/>
+        </p:spPr>
+        <p:style>
+          <a:lnRef idx="1">
+            <a:schemeClr val="accent1"/>
+          </a:lnRef>
+          <a:fillRef idx="3">
+            <a:schemeClr val="accent1"/>
+          </a:fillRef>
+          <a:effectRef idx="2">
+            <a:schemeClr val="accent1"/>
+          </a:effectRef>
+          <a:fontRef idx="minor">
+            <a:schemeClr val="lt1"/>
+          </a:fontRef>
+        </p:style>
+        <p:txBody>
+          <a:bodyPr rtlCol="0" anchor="ctr"/>
+          <a:lstStyle/>
+          <a:p>
+            <a:pPr algn="ctr"/>
+          </a:p>
+        </p:txBody>
+      </p:sp>
+      <p:sp>
+        <p:nvSpPr>
+          <p:cNvPr id="8" name="Oval 7"/>
+          <p:cNvSpPr/>
+          <p:nvPr/>
+        </p:nvSpPr>
+        <p:spPr>
+          <a:xfrm>
+            <a:off x="2633472" y="1481328"/>
+            <a:ext cx="530352" cy="530352"/>
+          </a:xfrm>
+          <a:prstGeom prst="ellipse">
             <a:avLst/>
           </a:prstGeom>
           <a:solidFill>
@@ -7605,139 +7649,7 @@
       </p:sp>
       <p:sp>
         <p:nvSpPr>
-          <p:cNvPr id="8" name="Rectangle 7"/>
-          <p:cNvSpPr/>
-          <p:nvPr/>
-        </p:nvSpPr>
-        <p:spPr>
-          <a:xfrm>
-            <a:off x="6359651" y="1730959"/>
-            <a:ext cx="2665476" cy="31089"/>
-          </a:xfrm>
-          <a:prstGeom prst="rect">
-            <a:avLst/>
-          </a:prstGeom>
-          <a:solidFill>
-            <a:srgbClr val="14B8A6"/>
-          </a:solidFill>
-          <a:ln>
-            <a:noFill/>
-          </a:ln>
-          <a:effectLst/>
-        </p:spPr>
-        <p:style>
-          <a:lnRef idx="1">
-            <a:schemeClr val="accent1"/>
-          </a:lnRef>
-          <a:fillRef idx="3">
-            <a:schemeClr val="accent1"/>
-          </a:fillRef>
-          <a:effectRef idx="2">
-            <a:schemeClr val="accent1"/>
-          </a:effectRef>
-          <a:fontRef idx="minor">
-            <a:schemeClr val="lt1"/>
-          </a:fontRef>
-        </p:style>
-        <p:txBody>
-          <a:bodyPr rtlCol="0" anchor="ctr"/>
-          <a:lstStyle/>
-          <a:p>
-            <a:pPr algn="ctr"/>
-          </a:p>
-        </p:txBody>
-      </p:sp>
-      <p:sp>
-        <p:nvSpPr>
-          <p:cNvPr id="9" name="Isosceles Triangle 8"/>
-          <p:cNvSpPr/>
-          <p:nvPr/>
-        </p:nvSpPr>
-        <p:spPr>
-          <a:xfrm rot="5400000">
-            <a:off x="7619238" y="1673352"/>
-            <a:ext cx="146304" cy="146304"/>
-          </a:xfrm>
-          <a:prstGeom prst="triangle">
-            <a:avLst/>
-          </a:prstGeom>
-          <a:solidFill>
-            <a:srgbClr val="0D9488"/>
-          </a:solidFill>
-          <a:ln>
-            <a:noFill/>
-          </a:ln>
-          <a:effectLst/>
-        </p:spPr>
-        <p:style>
-          <a:lnRef idx="1">
-            <a:schemeClr val="accent1"/>
-          </a:lnRef>
-          <a:fillRef idx="3">
-            <a:schemeClr val="accent1"/>
-          </a:fillRef>
-          <a:effectRef idx="2">
-            <a:schemeClr val="accent1"/>
-          </a:effectRef>
-          <a:fontRef idx="minor">
-            <a:schemeClr val="lt1"/>
-          </a:fontRef>
-        </p:style>
-        <p:txBody>
-          <a:bodyPr rtlCol="0" anchor="ctr"/>
-          <a:lstStyle/>
-          <a:p>
-            <a:pPr algn="ctr"/>
-          </a:p>
-        </p:txBody>
-      </p:sp>
-      <p:sp>
-        <p:nvSpPr>
-          <p:cNvPr id="10" name="Oval 9"/>
-          <p:cNvSpPr/>
-          <p:nvPr/>
-        </p:nvSpPr>
-        <p:spPr>
-          <a:xfrm>
-            <a:off x="2633472" y="1481328"/>
-            <a:ext cx="530352" cy="530352"/>
-          </a:xfrm>
-          <a:prstGeom prst="ellipse">
-            <a:avLst/>
-          </a:prstGeom>
-          <a:solidFill>
-            <a:srgbClr val="0D9488"/>
-          </a:solidFill>
-          <a:ln>
-            <a:noFill/>
-          </a:ln>
-          <a:effectLst/>
-        </p:spPr>
-        <p:style>
-          <a:lnRef idx="1">
-            <a:schemeClr val="accent1"/>
-          </a:lnRef>
-          <a:fillRef idx="3">
-            <a:schemeClr val="accent1"/>
-          </a:fillRef>
-          <a:effectRef idx="2">
-            <a:schemeClr val="accent1"/>
-          </a:effectRef>
-          <a:fontRef idx="minor">
-            <a:schemeClr val="lt1"/>
-          </a:fontRef>
-        </p:style>
-        <p:txBody>
-          <a:bodyPr rtlCol="0" anchor="ctr"/>
-          <a:lstStyle/>
-          <a:p>
-            <a:pPr algn="ctr"/>
-          </a:p>
-        </p:txBody>
-      </p:sp>
-      <p:sp>
-        <p:nvSpPr>
-          <p:cNvPr id="11" name="TextBox 10"/>
+          <p:cNvPr id="9" name="TextBox 8"/>
           <p:cNvSpPr txBox="1"/>
           <p:nvPr/>
         </p:nvSpPr>
@@ -7772,7 +7684,7 @@
       </p:sp>
       <p:sp>
         <p:nvSpPr>
-          <p:cNvPr id="12" name="Rounded Rectangle 11"/>
+          <p:cNvPr id="10" name="Rounded Rectangle 9"/>
           <p:cNvSpPr/>
           <p:nvPr/>
         </p:nvSpPr>
@@ -7820,7 +7732,7 @@
       </p:sp>
       <p:sp>
         <p:nvSpPr>
-          <p:cNvPr id="13" name="TextBox 12"/>
+          <p:cNvPr id="11" name="TextBox 10"/>
           <p:cNvSpPr txBox="1"/>
           <p:nvPr/>
         </p:nvSpPr>
@@ -7855,7 +7767,7 @@
       </p:sp>
       <p:sp>
         <p:nvSpPr>
-          <p:cNvPr id="14" name="TextBox 13"/>
+          <p:cNvPr id="12" name="TextBox 11"/>
           <p:cNvSpPr txBox="1"/>
           <p:nvPr/>
         </p:nvSpPr>
@@ -7894,7 +7806,7 @@
       </p:sp>
       <p:sp>
         <p:nvSpPr>
-          <p:cNvPr id="15" name="Oval 14"/>
+          <p:cNvPr id="13" name="Oval 12"/>
           <p:cNvSpPr/>
           <p:nvPr/>
         </p:nvSpPr>
@@ -7938,7 +7850,7 @@
       </p:sp>
       <p:sp>
         <p:nvSpPr>
-          <p:cNvPr id="16" name="TextBox 15"/>
+          <p:cNvPr id="14" name="TextBox 13"/>
           <p:cNvSpPr txBox="1"/>
           <p:nvPr/>
         </p:nvSpPr>
@@ -7973,7 +7885,7 @@
       </p:sp>
       <p:sp>
         <p:nvSpPr>
-          <p:cNvPr id="17" name="Rounded Rectangle 16"/>
+          <p:cNvPr id="15" name="Rounded Rectangle 14"/>
           <p:cNvSpPr/>
           <p:nvPr/>
         </p:nvSpPr>
@@ -8021,7 +7933,7 @@
       </p:sp>
       <p:sp>
         <p:nvSpPr>
-          <p:cNvPr id="18" name="TextBox 17"/>
+          <p:cNvPr id="16" name="TextBox 15"/>
           <p:cNvSpPr txBox="1"/>
           <p:nvPr/>
         </p:nvSpPr>
@@ -8056,7 +7968,7 @@
       </p:sp>
       <p:sp>
         <p:nvSpPr>
-          <p:cNvPr id="19" name="TextBox 18"/>
+          <p:cNvPr id="17" name="TextBox 16"/>
           <p:cNvSpPr txBox="1"/>
           <p:nvPr/>
         </p:nvSpPr>
@@ -8095,7 +8007,7 @@
       </p:sp>
       <p:sp>
         <p:nvSpPr>
-          <p:cNvPr id="20" name="Oval 19"/>
+          <p:cNvPr id="18" name="Oval 17"/>
           <p:cNvSpPr/>
           <p:nvPr/>
         </p:nvSpPr>
@@ -8139,7 +8051,7 @@
       </p:sp>
       <p:sp>
         <p:nvSpPr>
-          <p:cNvPr id="21" name="TextBox 20"/>
+          <p:cNvPr id="19" name="TextBox 18"/>
           <p:cNvSpPr txBox="1"/>
           <p:nvPr/>
         </p:nvSpPr>
@@ -8174,7 +8086,7 @@
       </p:sp>
       <p:sp>
         <p:nvSpPr>
-          <p:cNvPr id="22" name="Rounded Rectangle 21"/>
+          <p:cNvPr id="20" name="Rounded Rectangle 19"/>
           <p:cNvSpPr/>
           <p:nvPr/>
         </p:nvSpPr>
@@ -8222,7 +8134,7 @@
       </p:sp>
       <p:sp>
         <p:nvSpPr>
-          <p:cNvPr id="23" name="TextBox 22"/>
+          <p:cNvPr id="21" name="TextBox 20"/>
           <p:cNvSpPr txBox="1"/>
           <p:nvPr/>
         </p:nvSpPr>
@@ -8257,7 +8169,7 @@
       </p:sp>
       <p:sp>
         <p:nvSpPr>
-          <p:cNvPr id="24" name="TextBox 23"/>
+          <p:cNvPr id="22" name="TextBox 21"/>
           <p:cNvSpPr txBox="1"/>
           <p:nvPr/>
         </p:nvSpPr>
@@ -8296,7 +8208,7 @@
       </p:sp>
       <p:sp>
         <p:nvSpPr>
-          <p:cNvPr id="25" name="TextBox 24"/>
+          <p:cNvPr id="23" name="TextBox 22"/>
           <p:cNvSpPr txBox="1"/>
           <p:nvPr/>
         </p:nvSpPr>
@@ -8331,7 +8243,7 @@
       </p:sp>
       <p:sp>
         <p:nvSpPr>
-          <p:cNvPr id="26" name="TextBox 25"/>
+          <p:cNvPr id="24" name="TextBox 23"/>
           <p:cNvSpPr txBox="1"/>
           <p:nvPr/>
         </p:nvSpPr>
@@ -8366,7 +8278,7 @@
       </p:sp>
       <p:sp>
         <p:nvSpPr>
-          <p:cNvPr id="27" name="Rectangle 26"/>
+          <p:cNvPr id="25" name="Rectangle 24"/>
           <p:cNvSpPr/>
           <p:nvPr/>
         </p:nvSpPr>
@@ -8890,7 +8802,7 @@
           <a:p>
             <a:pPr>
               <a:lnSpc>
-                <a:spcPct val="115000"/>
+                <a:spcPct val="149500"/>
               </a:lnSpc>
             </a:pPr>
             <a:r>
@@ -8915,7 +8827,7 @@
           <a:p>
             <a:pPr>
               <a:lnSpc>
-                <a:spcPct val="115000"/>
+                <a:spcPct val="149500"/>
               </a:lnSpc>
             </a:pPr>
             <a:r>
@@ -8940,7 +8852,7 @@
           <a:p>
             <a:pPr>
               <a:lnSpc>
-                <a:spcPct val="115000"/>
+                <a:spcPct val="149500"/>
               </a:lnSpc>
             </a:pPr>
             <a:r>
@@ -9674,7 +9586,7 @@
           <a:p>
             <a:pPr>
               <a:lnSpc>
-                <a:spcPct val="115000"/>
+                <a:spcPct val="149500"/>
               </a:lnSpc>
             </a:pPr>
             <a:r>
@@ -9699,7 +9611,7 @@
           <a:p>
             <a:pPr>
               <a:lnSpc>
-                <a:spcPct val="115000"/>
+                <a:spcPct val="149500"/>
               </a:lnSpc>
             </a:pPr>
             <a:r>
@@ -9724,7 +9636,7 @@
           <a:p>
             <a:pPr>
               <a:lnSpc>
-                <a:spcPct val="115000"/>
+                <a:spcPct val="149500"/>
               </a:lnSpc>
             </a:pPr>
             <a:r>
@@ -10387,7 +10299,7 @@
           <a:p>
             <a:pPr>
               <a:lnSpc>
-                <a:spcPct val="115000"/>
+                <a:spcPct val="149500"/>
               </a:lnSpc>
             </a:pPr>
             <a:r>
@@ -10412,7 +10324,7 @@
           <a:p>
             <a:pPr>
               <a:lnSpc>
-                <a:spcPct val="115000"/>
+                <a:spcPct val="149500"/>
               </a:lnSpc>
             </a:pPr>
             <a:r>
@@ -10437,7 +10349,7 @@
           <a:p>
             <a:pPr>
               <a:lnSpc>
-                <a:spcPct val="115000"/>
+                <a:spcPct val="149500"/>
               </a:lnSpc>
             </a:pPr>
             <a:r>
@@ -10828,7 +10740,7 @@
           <a:p>
             <a:pPr>
               <a:lnSpc>
-                <a:spcPct val="115000"/>
+                <a:spcPct val="149500"/>
               </a:lnSpc>
             </a:pPr>
             <a:r>
@@ -10853,7 +10765,7 @@
           <a:p>
             <a:pPr>
               <a:lnSpc>
-                <a:spcPct val="115000"/>
+                <a:spcPct val="149500"/>
               </a:lnSpc>
             </a:pPr>
             <a:r>
@@ -10878,7 +10790,7 @@
           <a:p>
             <a:pPr>
               <a:lnSpc>
-                <a:spcPct val="115000"/>
+                <a:spcPct val="149500"/>
               </a:lnSpc>
             </a:pPr>
             <a:r>

--- a/class/cloud_infra_mgmt/14주차_통합실습2/01_강의자료/1차시_HPA개념과오토스케일링설정.pptx
+++ b/class/cloud_infra_mgmt/14주차_통합실습2/01_강의자료/1차시_HPA개념과오토스케일링설정.pptx
@@ -4991,6 +4991,8 @@
                   <a:srgbClr val="14B8A6"/>
                 </a:solidFill>
                 <a:latin typeface="맑은 고딕"/>
+                <a:ea typeface="맑은 고딕"/>
+                <a:cs typeface="맑은 고딕"/>
               </a:rPr>
               <a:t>클라우드인프라관리  ·  14주차 1차시 [VM 전용]</a:t>
             </a:r>
@@ -5026,6 +5028,8 @@
                   <a:srgbClr val="FFFFFF"/>
                 </a:solidFill>
                 <a:latin typeface="맑은 고딕"/>
+                <a:ea typeface="맑은 고딕"/>
+                <a:cs typeface="맑은 고딕"/>
               </a:rPr>
               <a:t>HPA 개념과 오토스케일링 설정</a:t>
             </a:r>
@@ -5061,6 +5065,8 @@
                   <a:srgbClr val="C9D3E6"/>
                 </a:solidFill>
                 <a:latin typeface="맑은 고딕"/>
+                <a:ea typeface="맑은 고딕"/>
+                <a:cs typeface="맑은 고딕"/>
               </a:rPr>
               <a:t>트래픽에 따라 Pod 개수가 스스로 늘어난다면</a:t>
             </a:r>
@@ -5096,6 +5102,8 @@
                   <a:srgbClr val="FFFFFF"/>
                 </a:solidFill>
                 <a:latin typeface="맑은 고딕"/>
+                <a:ea typeface="맑은 고딕"/>
+                <a:cs typeface="맑은 고딕"/>
               </a:rPr>
               <a:t>영남이공대학교 김지윤교수</a:t>
             </a:r>
@@ -5255,6 +5263,8 @@
                   <a:srgbClr val="14213D"/>
                 </a:solidFill>
                 <a:latin typeface="맑은 고딕"/>
+                <a:ea typeface="맑은 고딕"/>
+                <a:cs typeface="맑은 고딕"/>
               </a:rPr>
               <a:t>02</a:t>
             </a:r>
@@ -5290,6 +5300,8 @@
                   <a:srgbClr val="14B8A6"/>
                 </a:solidFill>
                 <a:latin typeface="맑은 고딕"/>
+                <a:ea typeface="맑은 고딕"/>
+                <a:cs typeface="맑은 고딕"/>
               </a:rPr>
               <a:t>PART 2 · HPA 동작 원리</a:t>
             </a:r>
@@ -5325,6 +5337,8 @@
                   <a:srgbClr val="FFFFFF"/>
                 </a:solidFill>
                 <a:latin typeface="맑은 고딕"/>
+                <a:ea typeface="맑은 고딕"/>
+                <a:cs typeface="맑은 고딕"/>
               </a:rPr>
               <a:t>HPA 생성 명령어</a:t>
             </a:r>
@@ -5364,6 +5378,8 @@
                   <a:srgbClr val="0D9488"/>
                 </a:solidFill>
                 <a:latin typeface="맑은 고딕"/>
+                <a:ea typeface="맑은 고딕"/>
+                <a:cs typeface="맑은 고딕"/>
               </a:rPr>
               <a:t>●  </a:t>
             </a:r>
@@ -5373,6 +5389,8 @@
                   <a:srgbClr val="222733"/>
                 </a:solidFill>
                 <a:latin typeface="맑은 고딕"/>
+                <a:ea typeface="맑은 고딕"/>
+                <a:cs typeface="맑은 고딕"/>
               </a:rPr>
               <a:t>kubectl autoscale deployment chatbot --cpu-percent=50 --min=1 --max=5</a:t>
             </a:r>
@@ -5389,6 +5407,8 @@
                   <a:srgbClr val="0D9488"/>
                 </a:solidFill>
                 <a:latin typeface="맑은 고딕"/>
+                <a:ea typeface="맑은 고딕"/>
+                <a:cs typeface="맑은 고딕"/>
               </a:rPr>
               <a:t>●  </a:t>
             </a:r>
@@ -5398,6 +5418,8 @@
                   <a:srgbClr val="222733"/>
                 </a:solidFill>
                 <a:latin typeface="맑은 고딕"/>
+                <a:ea typeface="맑은 고딕"/>
+                <a:cs typeface="맑은 고딕"/>
               </a:rPr>
               <a:t>→ CPU 사용률이 50%를 넘으면 Pod를 늘리고, 최소 1개~최대 5개 사이에서 조정</a:t>
             </a:r>
@@ -5414,6 +5436,8 @@
                   <a:srgbClr val="0D9488"/>
                 </a:solidFill>
                 <a:latin typeface="맑은 고딕"/>
+                <a:ea typeface="맑은 고딕"/>
+                <a:cs typeface="맑은 고딕"/>
               </a:rPr>
               <a:t>●  </a:t>
             </a:r>
@@ -5423,6 +5447,8 @@
                   <a:srgbClr val="222733"/>
                 </a:solidFill>
                 <a:latin typeface="맑은 고딕"/>
+                <a:ea typeface="맑은 고딕"/>
+                <a:cs typeface="맑은 고딕"/>
               </a:rPr>
               <a:t>kubectl get hpa 로 TARGET(현재/목표 %)과 REPLICAS(현재 Pod 수) 실시간 확인</a:t>
             </a:r>
@@ -5458,6 +5484,8 @@
                   <a:srgbClr val="5B6373"/>
                 </a:solidFill>
                 <a:latin typeface="맑은 고딕"/>
+                <a:ea typeface="맑은 고딕"/>
+                <a:cs typeface="맑은 고딕"/>
               </a:rPr>
               <a:t>클라우드인프라관리  ·  14주차 1차시 [VM 전용]</a:t>
             </a:r>
@@ -5493,6 +5521,8 @@
                   <a:srgbClr val="5B6373"/>
                 </a:solidFill>
                 <a:latin typeface="맑은 고딕"/>
+                <a:ea typeface="맑은 고딕"/>
+                <a:cs typeface="맑은 고딕"/>
               </a:rPr>
               <a:t>10 / 14</a:t>
             </a:r>
@@ -5696,6 +5726,8 @@
                   <a:srgbClr val="14213D"/>
                 </a:solidFill>
                 <a:latin typeface="맑은 고딕"/>
+                <a:ea typeface="맑은 고딕"/>
+                <a:cs typeface="맑은 고딕"/>
               </a:rPr>
               <a:t>03</a:t>
             </a:r>
@@ -5731,6 +5763,8 @@
                   <a:srgbClr val="14B8A6"/>
                 </a:solidFill>
                 <a:latin typeface="맑은 고딕"/>
+                <a:ea typeface="맑은 고딕"/>
+                <a:cs typeface="맑은 고딕"/>
               </a:rPr>
               <a:t>실습 안내</a:t>
             </a:r>
@@ -5766,6 +5800,8 @@
                   <a:srgbClr val="FFFFFF"/>
                 </a:solidFill>
                 <a:latin typeface="맑은 고딕"/>
+                <a:ea typeface="맑은 고딕"/>
+                <a:cs typeface="맑은 고딕"/>
               </a:rPr>
               <a:t>VM 실습 — metrics-server + HPA 설정</a:t>
             </a:r>
@@ -5805,6 +5841,8 @@
                   <a:srgbClr val="0D9488"/>
                 </a:solidFill>
                 <a:latin typeface="맑은 고딕"/>
+                <a:ea typeface="맑은 고딕"/>
+                <a:cs typeface="맑은 고딕"/>
               </a:rPr>
               <a:t>●  </a:t>
             </a:r>
@@ -5814,6 +5852,8 @@
                   <a:srgbClr val="222733"/>
                 </a:solidFill>
                 <a:latin typeface="맑은 고딕"/>
+                <a:ea typeface="맑은 고딕"/>
+                <a:cs typeface="맑은 고딕"/>
               </a:rPr>
               <a:t>minikube addons enable metrics-server 후 kubectl top pods로 수집 확인</a:t>
             </a:r>
@@ -5830,6 +5870,8 @@
                   <a:srgbClr val="0D9488"/>
                 </a:solidFill>
                 <a:latin typeface="맑은 고딕"/>
+                <a:ea typeface="맑은 고딕"/>
+                <a:cs typeface="맑은 고딕"/>
               </a:rPr>
               <a:t>●  </a:t>
             </a:r>
@@ -5839,6 +5881,8 @@
                   <a:srgbClr val="222733"/>
                 </a:solidFill>
                 <a:latin typeface="맑은 고딕"/>
+                <a:ea typeface="맑은 고딕"/>
+                <a:cs typeface="맑은 고딕"/>
               </a:rPr>
               <a:t>kubectl set resources 로 chatbot의 resource request를 낮게 설정</a:t>
             </a:r>
@@ -5855,6 +5899,8 @@
                   <a:srgbClr val="0D9488"/>
                 </a:solidFill>
                 <a:latin typeface="맑은 고딕"/>
+                <a:ea typeface="맑은 고딕"/>
+                <a:cs typeface="맑은 고딕"/>
               </a:rPr>
               <a:t>●  </a:t>
             </a:r>
@@ -5864,6 +5910,8 @@
                   <a:srgbClr val="222733"/>
                 </a:solidFill>
                 <a:latin typeface="맑은 고딕"/>
+                <a:ea typeface="맑은 고딕"/>
+                <a:cs typeface="맑은 고딕"/>
               </a:rPr>
               <a:t>kubectl autoscale deployment chatbot --cpu-percent=50 --min=1 --max=5 실행</a:t>
             </a:r>
@@ -5880,6 +5928,8 @@
                   <a:srgbClr val="0D9488"/>
                 </a:solidFill>
                 <a:latin typeface="맑은 고딕"/>
+                <a:ea typeface="맑은 고딕"/>
+                <a:cs typeface="맑은 고딕"/>
               </a:rPr>
               <a:t>●  </a:t>
             </a:r>
@@ -5889,6 +5939,8 @@
                   <a:srgbClr val="222733"/>
                 </a:solidFill>
                 <a:latin typeface="맑은 고딕"/>
+                <a:ea typeface="맑은 고딕"/>
+                <a:cs typeface="맑은 고딕"/>
               </a:rPr>
               <a:t>kubectl get hpa 로 HPA가 생성되고 TARGET 값이 보이는지 확인</a:t>
             </a:r>
@@ -5924,6 +5976,8 @@
                   <a:srgbClr val="5B6373"/>
                 </a:solidFill>
                 <a:latin typeface="맑은 고딕"/>
+                <a:ea typeface="맑은 고딕"/>
+                <a:cs typeface="맑은 고딕"/>
               </a:rPr>
               <a:t>클라우드인프라관리  ·  14주차 1차시 [VM 전용]</a:t>
             </a:r>
@@ -5959,6 +6013,8 @@
                   <a:srgbClr val="5B6373"/>
                 </a:solidFill>
                 <a:latin typeface="맑은 고딕"/>
+                <a:ea typeface="맑은 고딕"/>
+                <a:cs typeface="맑은 고딕"/>
               </a:rPr>
               <a:t>11 / 14</a:t>
             </a:r>
@@ -6162,6 +6218,8 @@
                   <a:srgbClr val="14213D"/>
                 </a:solidFill>
                 <a:latin typeface="맑은 고딕"/>
+                <a:ea typeface="맑은 고딕"/>
+                <a:cs typeface="맑은 고딕"/>
               </a:rPr>
               <a:t>03</a:t>
             </a:r>
@@ -6197,6 +6255,8 @@
                   <a:srgbClr val="14B8A6"/>
                 </a:solidFill>
                 <a:latin typeface="맑은 고딕"/>
+                <a:ea typeface="맑은 고딕"/>
+                <a:cs typeface="맑은 고딕"/>
               </a:rPr>
               <a:t>실습 안내</a:t>
             </a:r>
@@ -6232,6 +6292,8 @@
                   <a:srgbClr val="FFFFFF"/>
                 </a:solidFill>
                 <a:latin typeface="맑은 고딕"/>
+                <a:ea typeface="맑은 고딕"/>
+                <a:cs typeface="맑은 고딕"/>
               </a:rPr>
               <a:t>결과 정리 및 제출</a:t>
             </a:r>
@@ -6271,6 +6333,8 @@
                   <a:srgbClr val="0D9488"/>
                 </a:solidFill>
                 <a:latin typeface="맑은 고딕"/>
+                <a:ea typeface="맑은 고딕"/>
+                <a:cs typeface="맑은 고딕"/>
               </a:rPr>
               <a:t>●  </a:t>
             </a:r>
@@ -6280,6 +6344,8 @@
                   <a:srgbClr val="222733"/>
                 </a:solidFill>
                 <a:latin typeface="맑은 고딕"/>
+                <a:ea typeface="맑은 고딕"/>
+                <a:cs typeface="맑은 고딕"/>
               </a:rPr>
               <a:t>kubectl top pods 결과 캡처(CPU 사용률이 실제로 보이는 화면)</a:t>
             </a:r>
@@ -6296,6 +6362,8 @@
                   <a:srgbClr val="0D9488"/>
                 </a:solidFill>
                 <a:latin typeface="맑은 고딕"/>
+                <a:ea typeface="맑은 고딕"/>
+                <a:cs typeface="맑은 고딕"/>
               </a:rPr>
               <a:t>●  </a:t>
             </a:r>
@@ -6305,6 +6373,8 @@
                   <a:srgbClr val="222733"/>
                 </a:solidFill>
                 <a:latin typeface="맑은 고딕"/>
+                <a:ea typeface="맑은 고딕"/>
+                <a:cs typeface="맑은 고딕"/>
               </a:rPr>
               <a:t>kubectl get hpa 결과 캡처(REPLICAS: 1/1 등 초기 상태)</a:t>
             </a:r>
@@ -6321,6 +6391,8 @@
                   <a:srgbClr val="0D9488"/>
                 </a:solidFill>
                 <a:latin typeface="맑은 고딕"/>
+                <a:ea typeface="맑은 고딕"/>
+                <a:cs typeface="맑은 고딕"/>
               </a:rPr>
               <a:t>●  </a:t>
             </a:r>
@@ -6330,6 +6402,8 @@
                   <a:srgbClr val="222733"/>
                 </a:solidFill>
                 <a:latin typeface="맑은 고딕"/>
+                <a:ea typeface="맑은 고딕"/>
+                <a:cs typeface="맑은 고딕"/>
               </a:rPr>
               <a:t>다음 2차시에 이 HPA를 실제로 트리거하는 부하 테스트를 진행하니 오늘 설정을 지우지 말 것</a:t>
             </a:r>
@@ -6365,6 +6439,8 @@
                   <a:srgbClr val="5B6373"/>
                 </a:solidFill>
                 <a:latin typeface="맑은 고딕"/>
+                <a:ea typeface="맑은 고딕"/>
+                <a:cs typeface="맑은 고딕"/>
               </a:rPr>
               <a:t>클라우드인프라관리  ·  14주차 1차시 [VM 전용]</a:t>
             </a:r>
@@ -6400,6 +6476,8 @@
                   <a:srgbClr val="5B6373"/>
                 </a:solidFill>
                 <a:latin typeface="맑은 고딕"/>
+                <a:ea typeface="맑은 고딕"/>
+                <a:cs typeface="맑은 고딕"/>
               </a:rPr>
               <a:t>12 / 14</a:t>
             </a:r>
@@ -6585,6 +6663,8 @@
                   <a:srgbClr val="FFFFFF"/>
                 </a:solidFill>
                 <a:latin typeface="맑은 고딕"/>
+                <a:ea typeface="맑은 고딕"/>
+                <a:cs typeface="맑은 고딕"/>
               </a:rPr>
               <a:t>오늘의 정리</a:t>
             </a:r>
@@ -6638,6 +6718,8 @@
                   <a:srgbClr val="14213D"/>
                 </a:solidFill>
                 <a:latin typeface="맑은 고딕"/>
+                <a:ea typeface="맑은 고딕"/>
+                <a:cs typeface="맑은 고딕"/>
               </a:rPr>
               <a:t>1</a:t>
             </a:r>
@@ -6673,6 +6755,8 @@
                   <a:srgbClr val="FFFFFF"/>
                 </a:solidFill>
                 <a:latin typeface="맑은 고딕"/>
+                <a:ea typeface="맑은 고딕"/>
+                <a:cs typeface="맑은 고딕"/>
               </a:rPr>
               <a:t>HPA는 CPU 사용률 같은 지표를 보고 Pod 개수를 자동으로 늘리거나 줄이는 K8s 기능이다</a:t>
             </a:r>
@@ -6726,6 +6810,8 @@
                   <a:srgbClr val="14213D"/>
                 </a:solidFill>
                 <a:latin typeface="맑은 고딕"/>
+                <a:ea typeface="맑은 고딕"/>
+                <a:cs typeface="맑은 고딕"/>
               </a:rPr>
               <a:t>2</a:t>
             </a:r>
@@ -6761,6 +6847,8 @@
                   <a:srgbClr val="FFFFFF"/>
                 </a:solidFill>
                 <a:latin typeface="맑은 고딕"/>
+                <a:ea typeface="맑은 고딕"/>
+                <a:cs typeface="맑은 고딕"/>
               </a:rPr>
               <a:t>HPA가 동작하려면 metrics-server(지표 수집)와 낮은 resource request(임계값 계산 기준)가 함께 필요하다</a:t>
             </a:r>
@@ -6902,6 +6990,8 @@
                   <a:srgbClr val="FFFFFF"/>
                 </a:solidFill>
                 <a:latin typeface="맑은 고딕"/>
+                <a:ea typeface="맑은 고딕"/>
+                <a:cs typeface="맑은 고딕"/>
               </a:rPr>
               <a:t>다음 차시 예고</a:t>
             </a:r>
@@ -6937,6 +7027,8 @@
                   <a:srgbClr val="14B8A6"/>
                 </a:solidFill>
                 <a:latin typeface="맑은 고딕"/>
+                <a:ea typeface="맑은 고딕"/>
+                <a:cs typeface="맑은 고딕"/>
               </a:rPr>
               <a:t>다음 차시 예고 — 14주차 2차시</a:t>
             </a:r>
@@ -6972,6 +7064,8 @@
                   <a:srgbClr val="FFFFFF"/>
                 </a:solidFill>
                 <a:latin typeface="맑은 고딕"/>
+                <a:ea typeface="맑은 고딕"/>
+                <a:cs typeface="맑은 고딕"/>
               </a:rPr>
               <a:t>ApacheBench로 실제 트래픽 폭주 상황을 만들어, 오늘 설정한 HPA가 정말로 Pod를 늘리는지 직접 확인합니다.</a:t>
             </a:r>
@@ -7113,6 +7207,8 @@
                   <a:srgbClr val="14B8A6"/>
                 </a:solidFill>
                 <a:latin typeface="맑은 고딕"/>
+                <a:ea typeface="맑은 고딕"/>
+                <a:cs typeface="맑은 고딕"/>
               </a:rPr>
               <a:t>SESSION OVERVIEW</a:t>
             </a:r>
@@ -7148,6 +7244,8 @@
                   <a:srgbClr val="FFFFFF"/>
                 </a:solidFill>
                 <a:latin typeface="맑은 고딕"/>
+                <a:ea typeface="맑은 고딕"/>
+                <a:cs typeface="맑은 고딕"/>
               </a:rPr>
               <a:t>오늘의 학습 목표</a:t>
             </a:r>
@@ -7187,6 +7285,8 @@
                   <a:srgbClr val="222733"/>
                 </a:solidFill>
                 <a:latin typeface="맑은 고딕"/>
+                <a:ea typeface="맑은 고딕"/>
+                <a:cs typeface="맑은 고딕"/>
               </a:rPr>
               <a:t>1.  HPA(오토스케일링)가 무엇이고 언제 필요한지 이해한다</a:t>
             </a:r>
@@ -7203,6 +7303,8 @@
                   <a:srgbClr val="222733"/>
                 </a:solidFill>
                 <a:latin typeface="맑은 고딕"/>
+                <a:ea typeface="맑은 고딕"/>
+                <a:cs typeface="맑은 고딕"/>
               </a:rPr>
               <a:t>2.  HPA가 동작하려면 metrics-server와 resource request가 필요한 이유를 이해한다</a:t>
             </a:r>
@@ -7219,6 +7321,8 @@
                   <a:srgbClr val="222733"/>
                 </a:solidFill>
                 <a:latin typeface="맑은 고딕"/>
+                <a:ea typeface="맑은 고딕"/>
+                <a:cs typeface="맑은 고딕"/>
               </a:rPr>
               <a:t>3.  chatbot Deployment에 HPA를 설정하고 준비 상태를 확인한다</a:t>
             </a:r>
@@ -7254,6 +7358,8 @@
                   <a:srgbClr val="5B6373"/>
                 </a:solidFill>
                 <a:latin typeface="맑은 고딕"/>
+                <a:ea typeface="맑은 고딕"/>
+                <a:cs typeface="맑은 고딕"/>
               </a:rPr>
               <a:t>클라우드인프라관리  ·  14주차 1차시 [VM 전용]</a:t>
             </a:r>
@@ -7289,6 +7395,8 @@
                   <a:srgbClr val="5B6373"/>
                 </a:solidFill>
                 <a:latin typeface="맑은 고딕"/>
+                <a:ea typeface="맑은 고딕"/>
+                <a:cs typeface="맑은 고딕"/>
               </a:rPr>
               <a:t>02 / 14</a:t>
             </a:r>
@@ -7474,6 +7582,8 @@
                   <a:srgbClr val="14B8A6"/>
                 </a:solidFill>
                 <a:latin typeface="맑은 고딕"/>
+                <a:ea typeface="맑은 고딕"/>
+                <a:cs typeface="맑은 고딕"/>
               </a:rPr>
               <a:t>SESSION OVERVIEW</a:t>
             </a:r>
@@ -7509,6 +7619,8 @@
                   <a:srgbClr val="FFFFFF"/>
                 </a:solidFill>
                 <a:latin typeface="맑은 고딕"/>
+                <a:ea typeface="맑은 고딕"/>
+                <a:cs typeface="맑은 고딕"/>
               </a:rPr>
               <a:t>오늘의 진행 순서 (Killercoda 없음)</a:t>
             </a:r>
@@ -7676,6 +7788,8 @@
                   <a:srgbClr val="FFFFFF"/>
                 </a:solidFill>
                 <a:latin typeface="맑은 고딕"/>
+                <a:ea typeface="맑은 고딕"/>
+                <a:cs typeface="맑은 고딕"/>
               </a:rPr>
               <a:t>1</a:t>
             </a:r>
@@ -7759,6 +7873,8 @@
                   <a:srgbClr val="14213D"/>
                 </a:solidFill>
                 <a:latin typeface="맑은 고딕"/>
+                <a:ea typeface="맑은 고딕"/>
+                <a:cs typeface="맑은 고딕"/>
               </a:rPr>
               <a:t>개념 설명</a:t>
             </a:r>
@@ -7798,6 +7914,8 @@
                   <a:srgbClr val="222733"/>
                 </a:solidFill>
                 <a:latin typeface="맑은 고딕"/>
+                <a:ea typeface="맑은 고딕"/>
+                <a:cs typeface="맑은 고딕"/>
               </a:rPr>
               <a:t>HPA 원리+사전 준비</a:t>
             </a:r>
@@ -7877,6 +7995,8 @@
                   <a:srgbClr val="FFFFFF"/>
                 </a:solidFill>
                 <a:latin typeface="맑은 고딕"/>
+                <a:ea typeface="맑은 고딕"/>
+                <a:cs typeface="맑은 고딕"/>
               </a:rPr>
               <a:t>2</a:t>
             </a:r>
@@ -7960,6 +8080,8 @@
                   <a:srgbClr val="14213D"/>
                 </a:solidFill>
                 <a:latin typeface="맑은 고딕"/>
+                <a:ea typeface="맑은 고딕"/>
+                <a:cs typeface="맑은 고딕"/>
               </a:rPr>
               <a:t>VM 실습</a:t>
             </a:r>
@@ -7999,6 +8121,8 @@
                   <a:srgbClr val="222733"/>
                 </a:solidFill>
                 <a:latin typeface="맑은 고딕"/>
+                <a:ea typeface="맑은 고딕"/>
+                <a:cs typeface="맑은 고딕"/>
               </a:rPr>
               <a:t>metrics-server+HPA 설정</a:t>
             </a:r>
@@ -8078,6 +8202,8 @@
                   <a:srgbClr val="FFFFFF"/>
                 </a:solidFill>
                 <a:latin typeface="맑은 고딕"/>
+                <a:ea typeface="맑은 고딕"/>
+                <a:cs typeface="맑은 고딕"/>
               </a:rPr>
               <a:t>3</a:t>
             </a:r>
@@ -8161,6 +8287,8 @@
                   <a:srgbClr val="14213D"/>
                 </a:solidFill>
                 <a:latin typeface="맑은 고딕"/>
+                <a:ea typeface="맑은 고딕"/>
+                <a:cs typeface="맑은 고딕"/>
               </a:rPr>
               <a:t>결과 정리</a:t>
             </a:r>
@@ -8200,6 +8328,8 @@
                   <a:srgbClr val="222733"/>
                 </a:solidFill>
                 <a:latin typeface="맑은 고딕"/>
+                <a:ea typeface="맑은 고딕"/>
+                <a:cs typeface="맑은 고딕"/>
               </a:rPr>
               <a:t>제출 안내</a:t>
             </a:r>
@@ -8235,6 +8365,8 @@
                   <a:srgbClr val="5B6373"/>
                 </a:solidFill>
                 <a:latin typeface="맑은 고딕"/>
+                <a:ea typeface="맑은 고딕"/>
+                <a:cs typeface="맑은 고딕"/>
               </a:rPr>
               <a:t>클라우드인프라관리  ·  14주차 1차시 [VM 전용]</a:t>
             </a:r>
@@ -8270,6 +8402,8 @@
                   <a:srgbClr val="5B6373"/>
                 </a:solidFill>
                 <a:latin typeface="맑은 고딕"/>
+                <a:ea typeface="맑은 고딕"/>
+                <a:cs typeface="맑은 고딕"/>
               </a:rPr>
               <a:t>03 / 14</a:t>
             </a:r>
@@ -8473,6 +8607,8 @@
                   <a:srgbClr val="14213D"/>
                 </a:solidFill>
                 <a:latin typeface="맑은 고딕"/>
+                <a:ea typeface="맑은 고딕"/>
+                <a:cs typeface="맑은 고딕"/>
               </a:rPr>
               <a:t>PART 01</a:t>
             </a:r>
@@ -8508,6 +8644,8 @@
                   <a:srgbClr val="FFFFFF"/>
                 </a:solidFill>
                 <a:latin typeface="맑은 고딕"/>
+                <a:ea typeface="맑은 고딕"/>
+                <a:cs typeface="맑은 고딕"/>
               </a:rPr>
               <a:t>왜 Pod 개수를 자동으로 늘려야 할까</a:t>
             </a:r>
@@ -8543,6 +8681,8 @@
                   <a:srgbClr val="C9D3E6"/>
                 </a:solidFill>
                 <a:latin typeface="맑은 고딕"/>
+                <a:ea typeface="맑은 고딕"/>
+                <a:cs typeface="맑은 고딕"/>
               </a:rPr>
               <a:t>13주차 챗봇이 갑자기 인기를 끈다면</a:t>
             </a:r>
@@ -8702,6 +8842,8 @@
                   <a:srgbClr val="14213D"/>
                 </a:solidFill>
                 <a:latin typeface="맑은 고딕"/>
+                <a:ea typeface="맑은 고딕"/>
+                <a:cs typeface="맑은 고딕"/>
               </a:rPr>
               <a:t>01</a:t>
             </a:r>
@@ -8737,6 +8879,8 @@
                   <a:srgbClr val="14B8A6"/>
                 </a:solidFill>
                 <a:latin typeface="맑은 고딕"/>
+                <a:ea typeface="맑은 고딕"/>
+                <a:cs typeface="맑은 고딕"/>
               </a:rPr>
               <a:t>PART 1 · 오토스케일링이 필요한 이유</a:t>
             </a:r>
@@ -8772,6 +8916,8 @@
                   <a:srgbClr val="FFFFFF"/>
                 </a:solidFill>
                 <a:latin typeface="맑은 고딕"/>
+                <a:ea typeface="맑은 고딕"/>
+                <a:cs typeface="맑은 고딕"/>
               </a:rPr>
               <a:t>트래픽은 항상 일정하지 않다</a:t>
             </a:r>
@@ -8811,6 +8957,8 @@
                   <a:srgbClr val="0D9488"/>
                 </a:solidFill>
                 <a:latin typeface="맑은 고딕"/>
+                <a:ea typeface="맑은 고딕"/>
+                <a:cs typeface="맑은 고딕"/>
               </a:rPr>
               <a:t>●  </a:t>
             </a:r>
@@ -8820,6 +8968,8 @@
                   <a:srgbClr val="222733"/>
                 </a:solidFill>
                 <a:latin typeface="맑은 고딕"/>
+                <a:ea typeface="맑은 고딕"/>
+                <a:cs typeface="맑은 고딕"/>
               </a:rPr>
               <a:t>1주차에서 배운 대로, 클라우드의 핵심 특징 중 하나가 '신속한 확장성'이었음</a:t>
             </a:r>
@@ -8836,6 +8986,8 @@
                   <a:srgbClr val="0D9488"/>
                 </a:solidFill>
                 <a:latin typeface="맑은 고딕"/>
+                <a:ea typeface="맑은 고딕"/>
+                <a:cs typeface="맑은 고딕"/>
               </a:rPr>
               <a:t>●  </a:t>
             </a:r>
@@ -8845,6 +8997,8 @@
                   <a:srgbClr val="222733"/>
                 </a:solidFill>
                 <a:latin typeface="맑은 고딕"/>
+                <a:ea typeface="맑은 고딕"/>
+                <a:cs typeface="맑은 고딕"/>
               </a:rPr>
               <a:t>13주차에 만든 챗봇 Pod가 1개뿐이라면, 갑자기 사용자가 몰릴 때 응답이 느려지거나 다운될 수 있음</a:t>
             </a:r>
@@ -8861,6 +9015,8 @@
                   <a:srgbClr val="0D9488"/>
                 </a:solidFill>
                 <a:latin typeface="맑은 고딕"/>
+                <a:ea typeface="맑은 고딕"/>
+                <a:cs typeface="맑은 고딕"/>
               </a:rPr>
               <a:t>●  </a:t>
             </a:r>
@@ -8870,6 +9026,8 @@
                   <a:srgbClr val="222733"/>
                 </a:solidFill>
                 <a:latin typeface="맑은 고딕"/>
+                <a:ea typeface="맑은 고딕"/>
+                <a:cs typeface="맑은 고딕"/>
               </a:rPr>
               <a:t>그렇다고 항상 Pod를 5개씩 띄워두면 평소엔 자원 낭비</a:t>
             </a:r>
@@ -8949,6 +9107,8 @@
                   <a:srgbClr val="FFFFFF"/>
                 </a:solidFill>
                 <a:latin typeface="맑은 고딕"/>
+                <a:ea typeface="맑은 고딕"/>
+                <a:cs typeface="맑은 고딕"/>
               </a:rPr>
               <a:t>💡  HPA(Horizontal Pod Autoscaler)</a:t>
             </a:r>
@@ -8984,6 +9144,8 @@
                   <a:srgbClr val="FFFFFF"/>
                 </a:solidFill>
                 <a:latin typeface="맑은 고딕"/>
+                <a:ea typeface="맑은 고딕"/>
+                <a:cs typeface="맑은 고딕"/>
               </a:rPr>
               <a:t>CPU 사용률 같은 지표를 보고, 필요할 때만 자동으로 Pod 개수를 늘리거나 줄이는 K8s 기능</a:t>
             </a:r>
@@ -9019,6 +9181,8 @@
                   <a:srgbClr val="5B6373"/>
                 </a:solidFill>
                 <a:latin typeface="맑은 고딕"/>
+                <a:ea typeface="맑은 고딕"/>
+                <a:cs typeface="맑은 고딕"/>
               </a:rPr>
               <a:t>클라우드인프라관리  ·  14주차 1차시 [VM 전용]</a:t>
             </a:r>
@@ -9054,6 +9218,8 @@
                   <a:srgbClr val="5B6373"/>
                 </a:solidFill>
                 <a:latin typeface="맑은 고딕"/>
+                <a:ea typeface="맑은 고딕"/>
+                <a:cs typeface="맑은 고딕"/>
               </a:rPr>
               <a:t>05 / 14</a:t>
             </a:r>
@@ -9257,6 +9423,8 @@
                   <a:srgbClr val="14213D"/>
                 </a:solidFill>
                 <a:latin typeface="맑은 고딕"/>
+                <a:ea typeface="맑은 고딕"/>
+                <a:cs typeface="맑은 고딕"/>
               </a:rPr>
               <a:t>PART 02</a:t>
             </a:r>
@@ -9292,6 +9460,8 @@
                   <a:srgbClr val="FFFFFF"/>
                 </a:solidFill>
                 <a:latin typeface="맑은 고딕"/>
+                <a:ea typeface="맑은 고딕"/>
+                <a:cs typeface="맑은 고딕"/>
               </a:rPr>
               <a:t>HPA가 동작하는 원리</a:t>
             </a:r>
@@ -9327,6 +9497,8 @@
                   <a:srgbClr val="C9D3E6"/>
                 </a:solidFill>
                 <a:latin typeface="맑은 고딕"/>
+                <a:ea typeface="맑은 고딕"/>
+                <a:cs typeface="맑은 고딕"/>
               </a:rPr>
               <a:t>지표 수집 → 판단 → 확장</a:t>
             </a:r>
@@ -9486,6 +9658,8 @@
                   <a:srgbClr val="14213D"/>
                 </a:solidFill>
                 <a:latin typeface="맑은 고딕"/>
+                <a:ea typeface="맑은 고딕"/>
+                <a:cs typeface="맑은 고딕"/>
               </a:rPr>
               <a:t>02</a:t>
             </a:r>
@@ -9521,6 +9695,8 @@
                   <a:srgbClr val="14B8A6"/>
                 </a:solidFill>
                 <a:latin typeface="맑은 고딕"/>
+                <a:ea typeface="맑은 고딕"/>
+                <a:cs typeface="맑은 고딕"/>
               </a:rPr>
               <a:t>PART 2 · HPA 동작 원리</a:t>
             </a:r>
@@ -9556,6 +9732,8 @@
                   <a:srgbClr val="FFFFFF"/>
                 </a:solidFill>
                 <a:latin typeface="맑은 고딕"/>
+                <a:ea typeface="맑은 고딕"/>
+                <a:cs typeface="맑은 고딕"/>
               </a:rPr>
               <a:t>HPA의 판단 과정</a:t>
             </a:r>
@@ -9595,6 +9773,8 @@
                   <a:srgbClr val="0D9488"/>
                 </a:solidFill>
                 <a:latin typeface="맑은 고딕"/>
+                <a:ea typeface="맑은 고딕"/>
+                <a:cs typeface="맑은 고딕"/>
               </a:rPr>
               <a:t>●  </a:t>
             </a:r>
@@ -9604,6 +9784,8 @@
                   <a:srgbClr val="222733"/>
                 </a:solidFill>
                 <a:latin typeface="맑은 고딕"/>
+                <a:ea typeface="맑은 고딕"/>
+                <a:cs typeface="맑은 고딕"/>
               </a:rPr>
               <a:t>metrics-server가 각 Pod의 실제 CPU 사용률을 주기적으로 수집</a:t>
             </a:r>
@@ -9620,6 +9802,8 @@
                   <a:srgbClr val="0D9488"/>
                 </a:solidFill>
                 <a:latin typeface="맑은 고딕"/>
+                <a:ea typeface="맑은 고딕"/>
+                <a:cs typeface="맑은 고딕"/>
               </a:rPr>
               <a:t>●  </a:t>
             </a:r>
@@ -9629,6 +9813,8 @@
                   <a:srgbClr val="222733"/>
                 </a:solidFill>
                 <a:latin typeface="맑은 고딕"/>
+                <a:ea typeface="맑은 고딕"/>
+                <a:cs typeface="맑은 고딕"/>
               </a:rPr>
               <a:t>HPA가 '설정한 목표치(예: 50%)'와 '실제 사용률'을 비교</a:t>
             </a:r>
@@ -9645,6 +9831,8 @@
                   <a:srgbClr val="0D9488"/>
                 </a:solidFill>
                 <a:latin typeface="맑은 고딕"/>
+                <a:ea typeface="맑은 고딕"/>
+                <a:cs typeface="맑은 고딕"/>
               </a:rPr>
               <a:t>●  </a:t>
             </a:r>
@@ -9654,6 +9842,8 @@
                   <a:srgbClr val="222733"/>
                 </a:solidFill>
                 <a:latin typeface="맑은 고딕"/>
+                <a:ea typeface="맑은 고딕"/>
+                <a:cs typeface="맑은 고딕"/>
               </a:rPr>
               <a:t>목표치를 넘으면 replicas를 늘리고(Scale-out), 줄어들면 다시 줄임(Scale-in)</a:t>
             </a:r>
@@ -9689,6 +9879,8 @@
                   <a:srgbClr val="14213D"/>
                 </a:solidFill>
                 <a:latin typeface="맑은 고딕"/>
+                <a:ea typeface="맑은 고딕"/>
+                <a:cs typeface="맑은 고딕"/>
               </a:rPr>
               <a:t>HPA 판단 흐름</a:t>
             </a:r>
@@ -9768,6 +9960,8 @@
                   <a:srgbClr val="FFFFFF"/>
                 </a:solidFill>
                 <a:latin typeface="맑은 고딕"/>
+                <a:ea typeface="맑은 고딕"/>
+                <a:cs typeface="맑은 고딕"/>
               </a:rPr>
               <a:t>metrics-server(수집)</a:t>
             </a:r>
@@ -9847,6 +10041,8 @@
                   <a:srgbClr val="FFFFFF"/>
                 </a:solidFill>
                 <a:latin typeface="맑은 고딕"/>
+                <a:ea typeface="맑은 고딕"/>
+                <a:cs typeface="맑은 고딕"/>
               </a:rPr>
               <a:t>HPA(목표치 비교·판단)</a:t>
             </a:r>
@@ -9926,6 +10122,8 @@
                   <a:srgbClr val="FFFFFF"/>
                 </a:solidFill>
                 <a:latin typeface="맑은 고딕"/>
+                <a:ea typeface="맑은 고딕"/>
+                <a:cs typeface="맑은 고딕"/>
               </a:rPr>
               <a:t>Deployment replicas 자동 조정</a:t>
             </a:r>
@@ -9961,6 +10159,8 @@
                   <a:srgbClr val="5B6373"/>
                 </a:solidFill>
                 <a:latin typeface="맑은 고딕"/>
+                <a:ea typeface="맑은 고딕"/>
+                <a:cs typeface="맑은 고딕"/>
               </a:rPr>
               <a:t>클라우드인프라관리  ·  14주차 1차시 [VM 전용]</a:t>
             </a:r>
@@ -9996,6 +10196,8 @@
                   <a:srgbClr val="5B6373"/>
                 </a:solidFill>
                 <a:latin typeface="맑은 고딕"/>
+                <a:ea typeface="맑은 고딕"/>
+                <a:cs typeface="맑은 고딕"/>
               </a:rPr>
               <a:t>07 / 14</a:t>
             </a:r>
@@ -10199,6 +10401,8 @@
                   <a:srgbClr val="14213D"/>
                 </a:solidFill>
                 <a:latin typeface="맑은 고딕"/>
+                <a:ea typeface="맑은 고딕"/>
+                <a:cs typeface="맑은 고딕"/>
               </a:rPr>
               <a:t>02</a:t>
             </a:r>
@@ -10234,6 +10438,8 @@
                   <a:srgbClr val="14B8A6"/>
                 </a:solidFill>
                 <a:latin typeface="맑은 고딕"/>
+                <a:ea typeface="맑은 고딕"/>
+                <a:cs typeface="맑은 고딕"/>
               </a:rPr>
               <a:t>PART 2 · HPA 동작 원리</a:t>
             </a:r>
@@ -10269,6 +10475,8 @@
                   <a:srgbClr val="FFFFFF"/>
                 </a:solidFill>
                 <a:latin typeface="맑은 고딕"/>
+                <a:ea typeface="맑은 고딕"/>
+                <a:cs typeface="맑은 고딕"/>
               </a:rPr>
               <a:t>사전 준비 ① — metrics-server</a:t>
             </a:r>
@@ -10308,6 +10516,8 @@
                   <a:srgbClr val="0D9488"/>
                 </a:solidFill>
                 <a:latin typeface="맑은 고딕"/>
+                <a:ea typeface="맑은 고딕"/>
+                <a:cs typeface="맑은 고딕"/>
               </a:rPr>
               <a:t>●  </a:t>
             </a:r>
@@ -10317,6 +10527,8 @@
                   <a:srgbClr val="222733"/>
                 </a:solidFill>
                 <a:latin typeface="맑은 고딕"/>
+                <a:ea typeface="맑은 고딕"/>
+                <a:cs typeface="맑은 고딕"/>
               </a:rPr>
               <a:t>HPA는 CPU 사용률을 알아야 판단할 수 있는데, 기본 minikube에는 이 수집 기능이 꺼져있음</a:t>
             </a:r>
@@ -10333,6 +10545,8 @@
                   <a:srgbClr val="0D9488"/>
                 </a:solidFill>
                 <a:latin typeface="맑은 고딕"/>
+                <a:ea typeface="맑은 고딕"/>
+                <a:cs typeface="맑은 고딕"/>
               </a:rPr>
               <a:t>●  </a:t>
             </a:r>
@@ -10342,6 +10556,8 @@
                   <a:srgbClr val="222733"/>
                 </a:solidFill>
                 <a:latin typeface="맑은 고딕"/>
+                <a:ea typeface="맑은 고딕"/>
+                <a:cs typeface="맑은 고딕"/>
               </a:rPr>
               <a:t>minikube addons enable metrics-server 로 활성화</a:t>
             </a:r>
@@ -10358,6 +10574,8 @@
                   <a:srgbClr val="0D9488"/>
                 </a:solidFill>
                 <a:latin typeface="맑은 고딕"/>
+                <a:ea typeface="맑은 고딕"/>
+                <a:cs typeface="맑은 고딕"/>
               </a:rPr>
               <a:t>●  </a:t>
             </a:r>
@@ -10367,6 +10585,8 @@
                   <a:srgbClr val="222733"/>
                 </a:solidFill>
                 <a:latin typeface="맑은 고딕"/>
+                <a:ea typeface="맑은 고딕"/>
+                <a:cs typeface="맑은 고딕"/>
               </a:rPr>
               <a:t>kubectl top pods 명령으로 실제 Pod별 CPU 사용률이 보이면 준비 완료</a:t>
             </a:r>
@@ -10402,6 +10622,8 @@
                   <a:srgbClr val="5B6373"/>
                 </a:solidFill>
                 <a:latin typeface="맑은 고딕"/>
+                <a:ea typeface="맑은 고딕"/>
+                <a:cs typeface="맑은 고딕"/>
               </a:rPr>
               <a:t>클라우드인프라관리  ·  14주차 1차시 [VM 전용]</a:t>
             </a:r>
@@ -10437,6 +10659,8 @@
                   <a:srgbClr val="5B6373"/>
                 </a:solidFill>
                 <a:latin typeface="맑은 고딕"/>
+                <a:ea typeface="맑은 고딕"/>
+                <a:cs typeface="맑은 고딕"/>
               </a:rPr>
               <a:t>08 / 14</a:t>
             </a:r>
@@ -10640,6 +10864,8 @@
                   <a:srgbClr val="14213D"/>
                 </a:solidFill>
                 <a:latin typeface="맑은 고딕"/>
+                <a:ea typeface="맑은 고딕"/>
+                <a:cs typeface="맑은 고딕"/>
               </a:rPr>
               <a:t>02</a:t>
             </a:r>
@@ -10675,6 +10901,8 @@
                   <a:srgbClr val="14B8A6"/>
                 </a:solidFill>
                 <a:latin typeface="맑은 고딕"/>
+                <a:ea typeface="맑은 고딕"/>
+                <a:cs typeface="맑은 고딕"/>
               </a:rPr>
               <a:t>PART 2 · HPA 동작 원리</a:t>
             </a:r>
@@ -10710,6 +10938,8 @@
                   <a:srgbClr val="FFFFFF"/>
                 </a:solidFill>
                 <a:latin typeface="맑은 고딕"/>
+                <a:ea typeface="맑은 고딕"/>
+                <a:cs typeface="맑은 고딕"/>
               </a:rPr>
               <a:t>사전 준비 ② — resource request</a:t>
             </a:r>
@@ -10749,6 +10979,8 @@
                   <a:srgbClr val="0D9488"/>
                 </a:solidFill>
                 <a:latin typeface="맑은 고딕"/>
+                <a:ea typeface="맑은 고딕"/>
+                <a:cs typeface="맑은 고딕"/>
               </a:rPr>
               <a:t>●  </a:t>
             </a:r>
@@ -10758,6 +10990,8 @@
                   <a:srgbClr val="222733"/>
                 </a:solidFill>
                 <a:latin typeface="맑은 고딕"/>
+                <a:ea typeface="맑은 고딕"/>
+                <a:cs typeface="맑은 고딕"/>
               </a:rPr>
               <a:t>HPA는 '실제 사용률'을 '요청한 양(request) 대비 %'로 계산함</a:t>
             </a:r>
@@ -10774,6 +11008,8 @@
                   <a:srgbClr val="0D9488"/>
                 </a:solidFill>
                 <a:latin typeface="맑은 고딕"/>
+                <a:ea typeface="맑은 고딕"/>
+                <a:cs typeface="맑은 고딕"/>
               </a:rPr>
               <a:t>●  </a:t>
             </a:r>
@@ -10783,6 +11019,8 @@
                   <a:srgbClr val="222733"/>
                 </a:solidFill>
                 <a:latin typeface="맑은 고딕"/>
+                <a:ea typeface="맑은 고딕"/>
+                <a:cs typeface="맑은 고딕"/>
               </a:rPr>
               <a:t>6주차에 다룬 개념과 달리, 여기서 request는 '컨테이너가 최소한 보장받는 자원'을 의미</a:t>
             </a:r>
@@ -10799,6 +11037,8 @@
                   <a:srgbClr val="0D9488"/>
                 </a:solidFill>
                 <a:latin typeface="맑은 고딕"/>
+                <a:ea typeface="맑은 고딕"/>
+                <a:cs typeface="맑은 고딕"/>
               </a:rPr>
               <a:t>●  </a:t>
             </a:r>
@@ -10808,6 +11048,8 @@
                   <a:srgbClr val="222733"/>
                 </a:solidFill>
                 <a:latin typeface="맑은 고딕"/>
+                <a:ea typeface="맑은 고딕"/>
+                <a:cs typeface="맑은 고딕"/>
               </a:rPr>
               <a:t>kubectl set resources deployment chatbot -c=web --requests=cpu=50m,memory=64Mi</a:t>
             </a:r>
@@ -10887,6 +11129,8 @@
                   <a:srgbClr val="FFFFFF"/>
                 </a:solidFill>
                 <a:latin typeface="맑은 고딕"/>
+                <a:ea typeface="맑은 고딕"/>
+                <a:cs typeface="맑은 고딕"/>
               </a:rPr>
               <a:t>⚠  검증된 주의사항</a:t>
             </a:r>
@@ -10922,6 +11166,8 @@
                   <a:srgbClr val="FFFFFF"/>
                 </a:solidFill>
                 <a:latin typeface="맑은 고딕"/>
+                <a:ea typeface="맑은 고딕"/>
+                <a:cs typeface="맑은 고딕"/>
               </a:rPr>
               <a:t>request를 너무 높게 잡으면, 실제 사용률이 목표치를 넘기 어려워 스케일업이 관찰되지 않습니다</a:t>
             </a:r>
@@ -10957,6 +11203,8 @@
                   <a:srgbClr val="5B6373"/>
                 </a:solidFill>
                 <a:latin typeface="맑은 고딕"/>
+                <a:ea typeface="맑은 고딕"/>
+                <a:cs typeface="맑은 고딕"/>
               </a:rPr>
               <a:t>클라우드인프라관리  ·  14주차 1차시 [VM 전용]</a:t>
             </a:r>
@@ -10992,6 +11240,8 @@
                   <a:srgbClr val="5B6373"/>
                 </a:solidFill>
                 <a:latin typeface="맑은 고딕"/>
+                <a:ea typeface="맑은 고딕"/>
+                <a:cs typeface="맑은 고딕"/>
               </a:rPr>
               <a:t>09 / 14</a:t>
             </a:r>
